--- a/DEV-1-16/for_students/DAY-2/ppt/dev1_07.pptx
+++ b/DEV-1-16/for_students/DAY-2/ppt/dev1_07.pptx
@@ -282,7 +282,7 @@
           <a:p>
             <a:fld id="{EF790F8C-5FB9-4EFE-BCC7-F735A3026FD8}" type="datetimeFigureOut">
               <a:rPr lang="ru-RU" smtClean="0"/>
-              <a:t>24.09.2024</a:t>
+              <a:t>11.12.2025</a:t>
             </a:fld>
             <a:endParaRPr lang="ru-RU"/>
           </a:p>
@@ -480,7 +480,7 @@
           <a:p>
             <a:fld id="{EF790F8C-5FB9-4EFE-BCC7-F735A3026FD8}" type="datetimeFigureOut">
               <a:rPr lang="ru-RU" smtClean="0"/>
-              <a:t>24.09.2024</a:t>
+              <a:t>11.12.2025</a:t>
             </a:fld>
             <a:endParaRPr lang="ru-RU"/>
           </a:p>
@@ -688,7 +688,7 @@
           <a:p>
             <a:fld id="{EF790F8C-5FB9-4EFE-BCC7-F735A3026FD8}" type="datetimeFigureOut">
               <a:rPr lang="ru-RU" smtClean="0"/>
-              <a:t>24.09.2024</a:t>
+              <a:t>11.12.2025</a:t>
             </a:fld>
             <a:endParaRPr lang="ru-RU"/>
           </a:p>
@@ -1700,7 +1700,7 @@
           <a:p>
             <a:fld id="{EF790F8C-5FB9-4EFE-BCC7-F735A3026FD8}" type="datetimeFigureOut">
               <a:rPr lang="ru-RU" smtClean="0"/>
-              <a:t>24.09.2024</a:t>
+              <a:t>11.12.2025</a:t>
             </a:fld>
             <a:endParaRPr lang="ru-RU"/>
           </a:p>
@@ -2811,7 +2811,7 @@
           <a:p>
             <a:fld id="{EF790F8C-5FB9-4EFE-BCC7-F735A3026FD8}" type="datetimeFigureOut">
               <a:rPr lang="ru-RU" smtClean="0"/>
-              <a:t>24.09.2024</a:t>
+              <a:t>11.12.2025</a:t>
             </a:fld>
             <a:endParaRPr lang="ru-RU"/>
           </a:p>
@@ -3086,7 +3086,7 @@
           <a:p>
             <a:fld id="{EF790F8C-5FB9-4EFE-BCC7-F735A3026FD8}" type="datetimeFigureOut">
               <a:rPr lang="ru-RU" smtClean="0"/>
-              <a:t>24.09.2024</a:t>
+              <a:t>11.12.2025</a:t>
             </a:fld>
             <a:endParaRPr lang="ru-RU"/>
           </a:p>
@@ -3351,7 +3351,7 @@
           <a:p>
             <a:fld id="{EF790F8C-5FB9-4EFE-BCC7-F735A3026FD8}" type="datetimeFigureOut">
               <a:rPr lang="ru-RU" smtClean="0"/>
-              <a:t>24.09.2024</a:t>
+              <a:t>11.12.2025</a:t>
             </a:fld>
             <a:endParaRPr lang="ru-RU"/>
           </a:p>
@@ -3763,7 +3763,7 @@
           <a:p>
             <a:fld id="{EF790F8C-5FB9-4EFE-BCC7-F735A3026FD8}" type="datetimeFigureOut">
               <a:rPr lang="ru-RU" smtClean="0"/>
-              <a:t>24.09.2024</a:t>
+              <a:t>11.12.2025</a:t>
             </a:fld>
             <a:endParaRPr lang="ru-RU"/>
           </a:p>
@@ -3904,7 +3904,7 @@
           <a:p>
             <a:fld id="{EF790F8C-5FB9-4EFE-BCC7-F735A3026FD8}" type="datetimeFigureOut">
               <a:rPr lang="ru-RU" smtClean="0"/>
-              <a:t>24.09.2024</a:t>
+              <a:t>11.12.2025</a:t>
             </a:fld>
             <a:endParaRPr lang="ru-RU"/>
           </a:p>
@@ -4017,7 +4017,7 @@
           <a:p>
             <a:fld id="{EF790F8C-5FB9-4EFE-BCC7-F735A3026FD8}" type="datetimeFigureOut">
               <a:rPr lang="ru-RU" smtClean="0"/>
-              <a:t>24.09.2024</a:t>
+              <a:t>11.12.2025</a:t>
             </a:fld>
             <a:endParaRPr lang="ru-RU"/>
           </a:p>
@@ -4328,7 +4328,7 @@
           <a:p>
             <a:fld id="{EF790F8C-5FB9-4EFE-BCC7-F735A3026FD8}" type="datetimeFigureOut">
               <a:rPr lang="ru-RU" smtClean="0"/>
-              <a:t>24.09.2024</a:t>
+              <a:t>11.12.2025</a:t>
             </a:fld>
             <a:endParaRPr lang="ru-RU"/>
           </a:p>
@@ -4616,7 +4616,7 @@
           <a:p>
             <a:fld id="{EF790F8C-5FB9-4EFE-BCC7-F735A3026FD8}" type="datetimeFigureOut">
               <a:rPr lang="ru-RU" smtClean="0"/>
-              <a:t>24.09.2024</a:t>
+              <a:t>11.12.2025</a:t>
             </a:fld>
             <a:endParaRPr lang="ru-RU"/>
           </a:p>
@@ -4857,7 +4857,7 @@
           <a:p>
             <a:fld id="{EF790F8C-5FB9-4EFE-BCC7-F735A3026FD8}" type="datetimeFigureOut">
               <a:rPr lang="ru-RU" smtClean="0"/>
-              <a:t>24.09.2024</a:t>
+              <a:t>11.12.2025</a:t>
             </a:fld>
             <a:endParaRPr lang="ru-RU"/>
           </a:p>
@@ -6019,7 +6019,7 @@
 </file>
 
 <file path=ppt/slides/slide1.xml><?xml version="1.0" encoding="utf-8"?>
-<p:sld xmlns:a="http://schemas.openxmlformats.org/drawingml/2006/main" xmlns:r="http://schemas.openxmlformats.org/officeDocument/2006/relationships" xmlns:p="http://schemas.openxmlformats.org/presentationml/2006/main">
+<p:sld xmlns:a="http://schemas.openxmlformats.org/drawingml/2006/main" xmlns:r="http://schemas.openxmlformats.org/officeDocument/2006/relationships" xmlns:p="http://schemas.openxmlformats.org/presentationml/2006/main" showMasterSp="0">
   <p:cSld>
     <p:spTree>
       <p:nvGrpSpPr>
